--- a/SST_Complete_Course_SagarSir/04_Full_Mock_Tests_महा_अभ्यास/Mock_Test_08.pptx
+++ b/SST_Complete_Course_SagarSir/04_Full_Mock_Tests_महा_अभ्यास/Mock_Test_08.pptx
@@ -3435,7 +3435,7 @@
               </a:defRPr>
             </a:pPr>
             <a:r>
-              <a:t>मार्गदर्शक: श्रवण कुमार 'सागर' (Sagar Sir)  |  Helpline: +91 91101 13671  |  sagarcoaching.tech</a:t>
+              <a:t>मार्गदर्शक: श्रवण कुमार 'सागर' (Sagar Sir)  |  sagarcoaching.tech</a:t>
             </a:r>
           </a:p>
         </p:txBody>
@@ -3626,7 +3626,7 @@
               </a:defRPr>
             </a:pPr>
             <a:r>
-              <a:t>WhatsApp / Helpline: +91 91101 13671  |  Official Website: sagarcoaching.tech  |  Slide 10 of 105</a:t>
+              <a:t>Official Website: sagarcoaching.tech  |  Slide 10 of 105</a:t>
             </a:r>
           </a:p>
         </p:txBody>
@@ -4160,7 +4160,7 @@
               </a:defRPr>
             </a:pPr>
             <a:r>
-              <a:t>WhatsApp / Helpline: +91 91101 13671  |  Official Website: sagarcoaching.tech  |  Slide 100 of 105</a:t>
+              <a:t>Official Website: sagarcoaching.tech  |  Slide 100 of 105</a:t>
             </a:r>
           </a:p>
         </p:txBody>
@@ -4694,7 +4694,7 @@
               </a:defRPr>
             </a:pPr>
             <a:r>
-              <a:t>WhatsApp / Helpline: +91 91101 13671  |  Official Website: sagarcoaching.tech  |  Slide 101 of 105</a:t>
+              <a:t>Official Website: sagarcoaching.tech  |  Slide 101 of 105</a:t>
             </a:r>
           </a:p>
         </p:txBody>
@@ -5160,7 +5160,7 @@
               </a:defRPr>
             </a:pPr>
             <a:r>
-              <a:t>WhatsApp / Helpline: +91 91101 13671  |  Official Website: sagarcoaching.tech  |  Slide 102 of 105</a:t>
+              <a:t>Official Website: sagarcoaching.tech  |  Slide 102 of 105</a:t>
             </a:r>
           </a:p>
         </p:txBody>
@@ -5694,7 +5694,7 @@
               </a:defRPr>
             </a:pPr>
             <a:r>
-              <a:t>WhatsApp / Helpline: +91 91101 13671  |  Official Website: sagarcoaching.tech  |  Slide 103 of 105</a:t>
+              <a:t>Official Website: sagarcoaching.tech  |  Slide 103 of 105</a:t>
             </a:r>
           </a:p>
         </p:txBody>
@@ -6036,7 +6036,7 @@
               </a:defRPr>
             </a:pPr>
             <a:r>
-              <a:t>WhatsApp / Helpline: +91 91101 13671  |  Official Website: sagarcoaching.tech  |  Slide 104 of 105</a:t>
+              <a:t>Official Website: sagarcoaching.tech  |  Slide 104 of 105</a:t>
             </a:r>
           </a:p>
         </p:txBody>
@@ -6301,7 +6301,7 @@
               </a:defRPr>
             </a:pPr>
             <a:r>
-              <a:t>इस टेस्ट की PDF डाउनलोड करें: sagarcoaching.tech | Helpline: +91 91101 13671</a:t>
+              <a:t>इस टेस्ट की PDF डाउनलोड करें: sagarcoaching.tech</a:t>
             </a:r>
           </a:p>
         </p:txBody>
@@ -6369,7 +6369,7 @@
               </a:defRPr>
             </a:pPr>
             <a:r>
-              <a:t>YouTube: NMMS King Sagar Sir  ★  App: Sagar Coaching Centre (Play Store)  ★  Website: https://sagarcoaching.tech  ★  Helpline: +91 91101 13671</a:t>
+              <a:t>YouTube: NMMS King Sagar Sir  ★  App: Sagar Coaching Centre (Play Store)  ★  Website: https://sagarcoaching.tech  ★  </a:t>
             </a:r>
           </a:p>
         </p:txBody>
@@ -6405,7 +6405,7 @@
               </a:defRPr>
             </a:pPr>
             <a:r>
-              <a:t>मार्गदर्शक: श्रवण कुमार 'सागर' (Sagar Sir)  |  Helpline: +91 91101 13671  |  sagarcoaching.tech</a:t>
+              <a:t>मार्गदर्शक: श्रवण कुमार 'सागर' (Sagar Sir)  |  sagarcoaching.tech</a:t>
             </a:r>
           </a:p>
         </p:txBody>
@@ -6596,7 +6596,7 @@
               </a:defRPr>
             </a:pPr>
             <a:r>
-              <a:t>WhatsApp / Helpline: +91 91101 13671  |  Official Website: sagarcoaching.tech  |  Slide 11 of 105</a:t>
+              <a:t>Official Website: sagarcoaching.tech  |  Slide 11 of 105</a:t>
             </a:r>
           </a:p>
         </p:txBody>
@@ -7062,7 +7062,7 @@
               </a:defRPr>
             </a:pPr>
             <a:r>
-              <a:t>WhatsApp / Helpline: +91 91101 13671  |  Official Website: sagarcoaching.tech  |  Slide 12 of 105</a:t>
+              <a:t>Official Website: sagarcoaching.tech  |  Slide 12 of 105</a:t>
             </a:r>
           </a:p>
         </p:txBody>
@@ -7596,7 +7596,7 @@
               </a:defRPr>
             </a:pPr>
             <a:r>
-              <a:t>WhatsApp / Helpline: +91 91101 13671  |  Official Website: sagarcoaching.tech  |  Slide 13 of 105</a:t>
+              <a:t>Official Website: sagarcoaching.tech  |  Slide 13 of 105</a:t>
             </a:r>
           </a:p>
         </p:txBody>
@@ -8062,7 +8062,7 @@
               </a:defRPr>
             </a:pPr>
             <a:r>
-              <a:t>WhatsApp / Helpline: +91 91101 13671  |  Official Website: sagarcoaching.tech  |  Slide 14 of 105</a:t>
+              <a:t>Official Website: sagarcoaching.tech  |  Slide 14 of 105</a:t>
             </a:r>
           </a:p>
         </p:txBody>
@@ -8596,7 +8596,7 @@
               </a:defRPr>
             </a:pPr>
             <a:r>
-              <a:t>WhatsApp / Helpline: +91 91101 13671  |  Official Website: sagarcoaching.tech  |  Slide 15 of 105</a:t>
+              <a:t>Official Website: sagarcoaching.tech  |  Slide 15 of 105</a:t>
             </a:r>
           </a:p>
         </p:txBody>
@@ -9062,7 +9062,7 @@
               </a:defRPr>
             </a:pPr>
             <a:r>
-              <a:t>WhatsApp / Helpline: +91 91101 13671  |  Official Website: sagarcoaching.tech  |  Slide 16 of 105</a:t>
+              <a:t>Official Website: sagarcoaching.tech  |  Slide 16 of 105</a:t>
             </a:r>
           </a:p>
         </p:txBody>
@@ -9596,7 +9596,7 @@
               </a:defRPr>
             </a:pPr>
             <a:r>
-              <a:t>WhatsApp / Helpline: +91 91101 13671  |  Official Website: sagarcoaching.tech  |  Slide 17 of 105</a:t>
+              <a:t>Official Website: sagarcoaching.tech  |  Slide 17 of 105</a:t>
             </a:r>
           </a:p>
         </p:txBody>
@@ -10062,7 +10062,7 @@
               </a:defRPr>
             </a:pPr>
             <a:r>
-              <a:t>WhatsApp / Helpline: +91 91101 13671  |  Official Website: sagarcoaching.tech  |  Slide 18 of 105</a:t>
+              <a:t>Official Website: sagarcoaching.tech  |  Slide 18 of 105</a:t>
             </a:r>
           </a:p>
         </p:txBody>
@@ -10596,7 +10596,7 @@
               </a:defRPr>
             </a:pPr>
             <a:r>
-              <a:t>WhatsApp / Helpline: +91 91101 13671  |  Official Website: sagarcoaching.tech  |  Slide 19 of 105</a:t>
+              <a:t>Official Website: sagarcoaching.tech  |  Slide 19 of 105</a:t>
             </a:r>
           </a:p>
         </p:txBody>
@@ -11062,7 +11062,7 @@
               </a:defRPr>
             </a:pPr>
             <a:r>
-              <a:t>WhatsApp / Helpline: +91 91101 13671  |  Official Website: sagarcoaching.tech  |  Slide 2 of 105</a:t>
+              <a:t>Official Website: sagarcoaching.tech  |  Slide 2 of 105</a:t>
             </a:r>
           </a:p>
         </p:txBody>
@@ -11403,7 +11403,7 @@
               </a:defRPr>
             </a:pPr>
             <a:r>
-              <a:t>WhatsApp / Helpline: +91 91101 13671  |  Official Website: sagarcoaching.tech  |  Slide 20 of 105</a:t>
+              <a:t>Official Website: sagarcoaching.tech  |  Slide 20 of 105</a:t>
             </a:r>
           </a:p>
         </p:txBody>
@@ -11937,7 +11937,7 @@
               </a:defRPr>
             </a:pPr>
             <a:r>
-              <a:t>WhatsApp / Helpline: +91 91101 13671  |  Official Website: sagarcoaching.tech  |  Slide 21 of 105</a:t>
+              <a:t>Official Website: sagarcoaching.tech  |  Slide 21 of 105</a:t>
             </a:r>
           </a:p>
         </p:txBody>
@@ -12403,7 +12403,7 @@
               </a:defRPr>
             </a:pPr>
             <a:r>
-              <a:t>WhatsApp / Helpline: +91 91101 13671  |  Official Website: sagarcoaching.tech  |  Slide 22 of 105</a:t>
+              <a:t>Official Website: sagarcoaching.tech  |  Slide 22 of 105</a:t>
             </a:r>
           </a:p>
         </p:txBody>
@@ -12937,7 +12937,7 @@
               </a:defRPr>
             </a:pPr>
             <a:r>
-              <a:t>WhatsApp / Helpline: +91 91101 13671  |  Official Website: sagarcoaching.tech  |  Slide 23 of 105</a:t>
+              <a:t>Official Website: sagarcoaching.tech  |  Slide 23 of 105</a:t>
             </a:r>
           </a:p>
         </p:txBody>
@@ -13403,7 +13403,7 @@
               </a:defRPr>
             </a:pPr>
             <a:r>
-              <a:t>WhatsApp / Helpline: +91 91101 13671  |  Official Website: sagarcoaching.tech  |  Slide 24 of 105</a:t>
+              <a:t>Official Website: sagarcoaching.tech  |  Slide 24 of 105</a:t>
             </a:r>
           </a:p>
         </p:txBody>
@@ -13937,7 +13937,7 @@
               </a:defRPr>
             </a:pPr>
             <a:r>
-              <a:t>WhatsApp / Helpline: +91 91101 13671  |  Official Website: sagarcoaching.tech  |  Slide 25 of 105</a:t>
+              <a:t>Official Website: sagarcoaching.tech  |  Slide 25 of 105</a:t>
             </a:r>
           </a:p>
         </p:txBody>
@@ -14403,7 +14403,7 @@
               </a:defRPr>
             </a:pPr>
             <a:r>
-              <a:t>WhatsApp / Helpline: +91 91101 13671  |  Official Website: sagarcoaching.tech  |  Slide 26 of 105</a:t>
+              <a:t>Official Website: sagarcoaching.tech  |  Slide 26 of 105</a:t>
             </a:r>
           </a:p>
         </p:txBody>
@@ -14937,7 +14937,7 @@
               </a:defRPr>
             </a:pPr>
             <a:r>
-              <a:t>WhatsApp / Helpline: +91 91101 13671  |  Official Website: sagarcoaching.tech  |  Slide 27 of 105</a:t>
+              <a:t>Official Website: sagarcoaching.tech  |  Slide 27 of 105</a:t>
             </a:r>
           </a:p>
         </p:txBody>
@@ -15403,7 +15403,7 @@
               </a:defRPr>
             </a:pPr>
             <a:r>
-              <a:t>WhatsApp / Helpline: +91 91101 13671  |  Official Website: sagarcoaching.tech  |  Slide 28 of 105</a:t>
+              <a:t>Official Website: sagarcoaching.tech  |  Slide 28 of 105</a:t>
             </a:r>
           </a:p>
         </p:txBody>
@@ -15937,7 +15937,7 @@
               </a:defRPr>
             </a:pPr>
             <a:r>
-              <a:t>WhatsApp / Helpline: +91 91101 13671  |  Official Website: sagarcoaching.tech  |  Slide 29 of 105</a:t>
+              <a:t>Official Website: sagarcoaching.tech  |  Slide 29 of 105</a:t>
             </a:r>
           </a:p>
         </p:txBody>
@@ -16403,7 +16403,7 @@
               </a:defRPr>
             </a:pPr>
             <a:r>
-              <a:t>WhatsApp / Helpline: +91 91101 13671  |  Official Website: sagarcoaching.tech  |  Slide 3 of 105</a:t>
+              <a:t>Official Website: sagarcoaching.tech  |  Slide 3 of 105</a:t>
             </a:r>
           </a:p>
         </p:txBody>
@@ -16869,7 +16869,7 @@
               </a:defRPr>
             </a:pPr>
             <a:r>
-              <a:t>WhatsApp / Helpline: +91 91101 13671  |  Official Website: sagarcoaching.tech  |  Slide 30 of 105</a:t>
+              <a:t>Official Website: sagarcoaching.tech  |  Slide 30 of 105</a:t>
             </a:r>
           </a:p>
         </p:txBody>
@@ -17403,7 +17403,7 @@
               </a:defRPr>
             </a:pPr>
             <a:r>
-              <a:t>WhatsApp / Helpline: +91 91101 13671  |  Official Website: sagarcoaching.tech  |  Slide 31 of 105</a:t>
+              <a:t>Official Website: sagarcoaching.tech  |  Slide 31 of 105</a:t>
             </a:r>
           </a:p>
         </p:txBody>
@@ -17869,7 +17869,7 @@
               </a:defRPr>
             </a:pPr>
             <a:r>
-              <a:t>WhatsApp / Helpline: +91 91101 13671  |  Official Website: sagarcoaching.tech  |  Slide 32 of 105</a:t>
+              <a:t>Official Website: sagarcoaching.tech  |  Slide 32 of 105</a:t>
             </a:r>
           </a:p>
         </p:txBody>
@@ -18403,7 +18403,7 @@
               </a:defRPr>
             </a:pPr>
             <a:r>
-              <a:t>WhatsApp / Helpline: +91 91101 13671  |  Official Website: sagarcoaching.tech  |  Slide 33 of 105</a:t>
+              <a:t>Official Website: sagarcoaching.tech  |  Slide 33 of 105</a:t>
             </a:r>
           </a:p>
         </p:txBody>
@@ -18869,7 +18869,7 @@
               </a:defRPr>
             </a:pPr>
             <a:r>
-              <a:t>WhatsApp / Helpline: +91 91101 13671  |  Official Website: sagarcoaching.tech  |  Slide 34 of 105</a:t>
+              <a:t>Official Website: sagarcoaching.tech  |  Slide 34 of 105</a:t>
             </a:r>
           </a:p>
         </p:txBody>
@@ -19403,7 +19403,7 @@
               </a:defRPr>
             </a:pPr>
             <a:r>
-              <a:t>WhatsApp / Helpline: +91 91101 13671  |  Official Website: sagarcoaching.tech  |  Slide 35 of 105</a:t>
+              <a:t>Official Website: sagarcoaching.tech  |  Slide 35 of 105</a:t>
             </a:r>
           </a:p>
         </p:txBody>
@@ -19869,7 +19869,7 @@
               </a:defRPr>
             </a:pPr>
             <a:r>
-              <a:t>WhatsApp / Helpline: +91 91101 13671  |  Official Website: sagarcoaching.tech  |  Slide 36 of 105</a:t>
+              <a:t>Official Website: sagarcoaching.tech  |  Slide 36 of 105</a:t>
             </a:r>
           </a:p>
         </p:txBody>
@@ -20403,7 +20403,7 @@
               </a:defRPr>
             </a:pPr>
             <a:r>
-              <a:t>WhatsApp / Helpline: +91 91101 13671  |  Official Website: sagarcoaching.tech  |  Slide 37 of 105</a:t>
+              <a:t>Official Website: sagarcoaching.tech  |  Slide 37 of 105</a:t>
             </a:r>
           </a:p>
         </p:txBody>
@@ -20869,7 +20869,7 @@
               </a:defRPr>
             </a:pPr>
             <a:r>
-              <a:t>WhatsApp / Helpline: +91 91101 13671  |  Official Website: sagarcoaching.tech  |  Slide 38 of 105</a:t>
+              <a:t>Official Website: sagarcoaching.tech  |  Slide 38 of 105</a:t>
             </a:r>
           </a:p>
         </p:txBody>
@@ -21403,7 +21403,7 @@
               </a:defRPr>
             </a:pPr>
             <a:r>
-              <a:t>WhatsApp / Helpline: +91 91101 13671  |  Official Website: sagarcoaching.tech  |  Slide 39 of 105</a:t>
+              <a:t>Official Website: sagarcoaching.tech  |  Slide 39 of 105</a:t>
             </a:r>
           </a:p>
         </p:txBody>
@@ -21869,7 +21869,7 @@
               </a:defRPr>
             </a:pPr>
             <a:r>
-              <a:t>WhatsApp / Helpline: +91 91101 13671  |  Official Website: sagarcoaching.tech  |  Slide 4 of 105</a:t>
+              <a:t>Official Website: sagarcoaching.tech  |  Slide 4 of 105</a:t>
             </a:r>
           </a:p>
         </p:txBody>
@@ -22403,7 +22403,7 @@
               </a:defRPr>
             </a:pPr>
             <a:r>
-              <a:t>WhatsApp / Helpline: +91 91101 13671  |  Official Website: sagarcoaching.tech  |  Slide 40 of 105</a:t>
+              <a:t>Official Website: sagarcoaching.tech  |  Slide 40 of 105</a:t>
             </a:r>
           </a:p>
         </p:txBody>
@@ -22937,7 +22937,7 @@
               </a:defRPr>
             </a:pPr>
             <a:r>
-              <a:t>WhatsApp / Helpline: +91 91101 13671  |  Official Website: sagarcoaching.tech  |  Slide 41 of 105</a:t>
+              <a:t>Official Website: sagarcoaching.tech  |  Slide 41 of 105</a:t>
             </a:r>
           </a:p>
         </p:txBody>
@@ -23403,7 +23403,7 @@
               </a:defRPr>
             </a:pPr>
             <a:r>
-              <a:t>WhatsApp / Helpline: +91 91101 13671  |  Official Website: sagarcoaching.tech  |  Slide 42 of 105</a:t>
+              <a:t>Official Website: sagarcoaching.tech  |  Slide 42 of 105</a:t>
             </a:r>
           </a:p>
         </p:txBody>
@@ -23937,7 +23937,7 @@
               </a:defRPr>
             </a:pPr>
             <a:r>
-              <a:t>WhatsApp / Helpline: +91 91101 13671  |  Official Website: sagarcoaching.tech  |  Slide 43 of 105</a:t>
+              <a:t>Official Website: sagarcoaching.tech  |  Slide 43 of 105</a:t>
             </a:r>
           </a:p>
         </p:txBody>
@@ -24403,7 +24403,7 @@
               </a:defRPr>
             </a:pPr>
             <a:r>
-              <a:t>WhatsApp / Helpline: +91 91101 13671  |  Official Website: sagarcoaching.tech  |  Slide 44 of 105</a:t>
+              <a:t>Official Website: sagarcoaching.tech  |  Slide 44 of 105</a:t>
             </a:r>
           </a:p>
         </p:txBody>
@@ -24937,7 +24937,7 @@
               </a:defRPr>
             </a:pPr>
             <a:r>
-              <a:t>WhatsApp / Helpline: +91 91101 13671  |  Official Website: sagarcoaching.tech  |  Slide 45 of 105</a:t>
+              <a:t>Official Website: sagarcoaching.tech  |  Slide 45 of 105</a:t>
             </a:r>
           </a:p>
         </p:txBody>
@@ -25403,7 +25403,7 @@
               </a:defRPr>
             </a:pPr>
             <a:r>
-              <a:t>WhatsApp / Helpline: +91 91101 13671  |  Official Website: sagarcoaching.tech  |  Slide 46 of 105</a:t>
+              <a:t>Official Website: sagarcoaching.tech  |  Slide 46 of 105</a:t>
             </a:r>
           </a:p>
         </p:txBody>
@@ -25937,7 +25937,7 @@
               </a:defRPr>
             </a:pPr>
             <a:r>
-              <a:t>WhatsApp / Helpline: +91 91101 13671  |  Official Website: sagarcoaching.tech  |  Slide 47 of 105</a:t>
+              <a:t>Official Website: sagarcoaching.tech  |  Slide 47 of 105</a:t>
             </a:r>
           </a:p>
         </p:txBody>
@@ -26403,7 +26403,7 @@
               </a:defRPr>
             </a:pPr>
             <a:r>
-              <a:t>WhatsApp / Helpline: +91 91101 13671  |  Official Website: sagarcoaching.tech  |  Slide 48 of 105</a:t>
+              <a:t>Official Website: sagarcoaching.tech  |  Slide 48 of 105</a:t>
             </a:r>
           </a:p>
         </p:txBody>
@@ -26937,7 +26937,7 @@
               </a:defRPr>
             </a:pPr>
             <a:r>
-              <a:t>WhatsApp / Helpline: +91 91101 13671  |  Official Website: sagarcoaching.tech  |  Slide 49 of 105</a:t>
+              <a:t>Official Website: sagarcoaching.tech  |  Slide 49 of 105</a:t>
             </a:r>
           </a:p>
         </p:txBody>
@@ -27403,7 +27403,7 @@
               </a:defRPr>
             </a:pPr>
             <a:r>
-              <a:t>WhatsApp / Helpline: +91 91101 13671  |  Official Website: sagarcoaching.tech  |  Slide 5 of 105</a:t>
+              <a:t>Official Website: sagarcoaching.tech  |  Slide 5 of 105</a:t>
             </a:r>
           </a:p>
         </p:txBody>
@@ -27869,7 +27869,7 @@
               </a:defRPr>
             </a:pPr>
             <a:r>
-              <a:t>WhatsApp / Helpline: +91 91101 13671  |  Official Website: sagarcoaching.tech  |  Slide 50 of 105</a:t>
+              <a:t>Official Website: sagarcoaching.tech  |  Slide 50 of 105</a:t>
             </a:r>
           </a:p>
         </p:txBody>
@@ -28403,7 +28403,7 @@
               </a:defRPr>
             </a:pPr>
             <a:r>
-              <a:t>WhatsApp / Helpline: +91 91101 13671  |  Official Website: sagarcoaching.tech  |  Slide 51 of 105</a:t>
+              <a:t>Official Website: sagarcoaching.tech  |  Slide 51 of 105</a:t>
             </a:r>
           </a:p>
         </p:txBody>
@@ -28869,7 +28869,7 @@
               </a:defRPr>
             </a:pPr>
             <a:r>
-              <a:t>WhatsApp / Helpline: +91 91101 13671  |  Official Website: sagarcoaching.tech  |  Slide 52 of 105</a:t>
+              <a:t>Official Website: sagarcoaching.tech  |  Slide 52 of 105</a:t>
             </a:r>
           </a:p>
         </p:txBody>
@@ -29403,7 +29403,7 @@
               </a:defRPr>
             </a:pPr>
             <a:r>
-              <a:t>WhatsApp / Helpline: +91 91101 13671  |  Official Website: sagarcoaching.tech  |  Slide 53 of 105</a:t>
+              <a:t>Official Website: sagarcoaching.tech  |  Slide 53 of 105</a:t>
             </a:r>
           </a:p>
         </p:txBody>
@@ -29869,7 +29869,7 @@
               </a:defRPr>
             </a:pPr>
             <a:r>
-              <a:t>WhatsApp / Helpline: +91 91101 13671  |  Official Website: sagarcoaching.tech  |  Slide 54 of 105</a:t>
+              <a:t>Official Website: sagarcoaching.tech  |  Slide 54 of 105</a:t>
             </a:r>
           </a:p>
         </p:txBody>
@@ -30403,7 +30403,7 @@
               </a:defRPr>
             </a:pPr>
             <a:r>
-              <a:t>WhatsApp / Helpline: +91 91101 13671  |  Official Website: sagarcoaching.tech  |  Slide 55 of 105</a:t>
+              <a:t>Official Website: sagarcoaching.tech  |  Slide 55 of 105</a:t>
             </a:r>
           </a:p>
         </p:txBody>
@@ -30869,7 +30869,7 @@
               </a:defRPr>
             </a:pPr>
             <a:r>
-              <a:t>WhatsApp / Helpline: +91 91101 13671  |  Official Website: sagarcoaching.tech  |  Slide 56 of 105</a:t>
+              <a:t>Official Website: sagarcoaching.tech  |  Slide 56 of 105</a:t>
             </a:r>
           </a:p>
         </p:txBody>
@@ -31403,7 +31403,7 @@
               </a:defRPr>
             </a:pPr>
             <a:r>
-              <a:t>WhatsApp / Helpline: +91 91101 13671  |  Official Website: sagarcoaching.tech  |  Slide 57 of 105</a:t>
+              <a:t>Official Website: sagarcoaching.tech  |  Slide 57 of 105</a:t>
             </a:r>
           </a:p>
         </p:txBody>
@@ -31869,7 +31869,7 @@
               </a:defRPr>
             </a:pPr>
             <a:r>
-              <a:t>WhatsApp / Helpline: +91 91101 13671  |  Official Website: sagarcoaching.tech  |  Slide 58 of 105</a:t>
+              <a:t>Official Website: sagarcoaching.tech  |  Slide 58 of 105</a:t>
             </a:r>
           </a:p>
         </p:txBody>
@@ -32403,7 +32403,7 @@
               </a:defRPr>
             </a:pPr>
             <a:r>
-              <a:t>WhatsApp / Helpline: +91 91101 13671  |  Official Website: sagarcoaching.tech  |  Slide 59 of 105</a:t>
+              <a:t>Official Website: sagarcoaching.tech  |  Slide 59 of 105</a:t>
             </a:r>
           </a:p>
         </p:txBody>
@@ -32869,7 +32869,7 @@
               </a:defRPr>
             </a:pPr>
             <a:r>
-              <a:t>WhatsApp / Helpline: +91 91101 13671  |  Official Website: sagarcoaching.tech  |  Slide 6 of 105</a:t>
+              <a:t>Official Website: sagarcoaching.tech  |  Slide 6 of 105</a:t>
             </a:r>
           </a:p>
         </p:txBody>
@@ -33403,7 +33403,7 @@
               </a:defRPr>
             </a:pPr>
             <a:r>
-              <a:t>WhatsApp / Helpline: +91 91101 13671  |  Official Website: sagarcoaching.tech  |  Slide 60 of 105</a:t>
+              <a:t>Official Website: sagarcoaching.tech  |  Slide 60 of 105</a:t>
             </a:r>
           </a:p>
         </p:txBody>
@@ -33937,7 +33937,7 @@
               </a:defRPr>
             </a:pPr>
             <a:r>
-              <a:t>WhatsApp / Helpline: +91 91101 13671  |  Official Website: sagarcoaching.tech  |  Slide 61 of 105</a:t>
+              <a:t>Official Website: sagarcoaching.tech  |  Slide 61 of 105</a:t>
             </a:r>
           </a:p>
         </p:txBody>
@@ -34403,7 +34403,7 @@
               </a:defRPr>
             </a:pPr>
             <a:r>
-              <a:t>WhatsApp / Helpline: +91 91101 13671  |  Official Website: sagarcoaching.tech  |  Slide 62 of 105</a:t>
+              <a:t>Official Website: sagarcoaching.tech  |  Slide 62 of 105</a:t>
             </a:r>
           </a:p>
         </p:txBody>
@@ -34937,7 +34937,7 @@
               </a:defRPr>
             </a:pPr>
             <a:r>
-              <a:t>WhatsApp / Helpline: +91 91101 13671  |  Official Website: sagarcoaching.tech  |  Slide 63 of 105</a:t>
+              <a:t>Official Website: sagarcoaching.tech  |  Slide 63 of 105</a:t>
             </a:r>
           </a:p>
         </p:txBody>
@@ -35403,7 +35403,7 @@
               </a:defRPr>
             </a:pPr>
             <a:r>
-              <a:t>WhatsApp / Helpline: +91 91101 13671  |  Official Website: sagarcoaching.tech  |  Slide 64 of 105</a:t>
+              <a:t>Official Website: sagarcoaching.tech  |  Slide 64 of 105</a:t>
             </a:r>
           </a:p>
         </p:txBody>
@@ -35937,7 +35937,7 @@
               </a:defRPr>
             </a:pPr>
             <a:r>
-              <a:t>WhatsApp / Helpline: +91 91101 13671  |  Official Website: sagarcoaching.tech  |  Slide 65 of 105</a:t>
+              <a:t>Official Website: sagarcoaching.tech  |  Slide 65 of 105</a:t>
             </a:r>
           </a:p>
         </p:txBody>
@@ -36403,7 +36403,7 @@
               </a:defRPr>
             </a:pPr>
             <a:r>
-              <a:t>WhatsApp / Helpline: +91 91101 13671  |  Official Website: sagarcoaching.tech  |  Slide 66 of 105</a:t>
+              <a:t>Official Website: sagarcoaching.tech  |  Slide 66 of 105</a:t>
             </a:r>
           </a:p>
         </p:txBody>
@@ -36937,7 +36937,7 @@
               </a:defRPr>
             </a:pPr>
             <a:r>
-              <a:t>WhatsApp / Helpline: +91 91101 13671  |  Official Website: sagarcoaching.tech  |  Slide 67 of 105</a:t>
+              <a:t>Official Website: sagarcoaching.tech  |  Slide 67 of 105</a:t>
             </a:r>
           </a:p>
         </p:txBody>
@@ -37403,7 +37403,7 @@
               </a:defRPr>
             </a:pPr>
             <a:r>
-              <a:t>WhatsApp / Helpline: +91 91101 13671  |  Official Website: sagarcoaching.tech  |  Slide 68 of 105</a:t>
+              <a:t>Official Website: sagarcoaching.tech  |  Slide 68 of 105</a:t>
             </a:r>
           </a:p>
         </p:txBody>
@@ -37937,7 +37937,7 @@
               </a:defRPr>
             </a:pPr>
             <a:r>
-              <a:t>WhatsApp / Helpline: +91 91101 13671  |  Official Website: sagarcoaching.tech  |  Slide 69 of 105</a:t>
+              <a:t>Official Website: sagarcoaching.tech  |  Slide 69 of 105</a:t>
             </a:r>
           </a:p>
         </p:txBody>
@@ -38403,7 +38403,7 @@
               </a:defRPr>
             </a:pPr>
             <a:r>
-              <a:t>WhatsApp / Helpline: +91 91101 13671  |  Official Website: sagarcoaching.tech  |  Slide 7 of 105</a:t>
+              <a:t>Official Website: sagarcoaching.tech  |  Slide 7 of 105</a:t>
             </a:r>
           </a:p>
         </p:txBody>
@@ -38869,7 +38869,7 @@
               </a:defRPr>
             </a:pPr>
             <a:r>
-              <a:t>WhatsApp / Helpline: +91 91101 13671  |  Official Website: sagarcoaching.tech  |  Slide 70 of 105</a:t>
+              <a:t>Official Website: sagarcoaching.tech  |  Slide 70 of 105</a:t>
             </a:r>
           </a:p>
         </p:txBody>
@@ -39403,7 +39403,7 @@
               </a:defRPr>
             </a:pPr>
             <a:r>
-              <a:t>WhatsApp / Helpline: +91 91101 13671  |  Official Website: sagarcoaching.tech  |  Slide 71 of 105</a:t>
+              <a:t>Official Website: sagarcoaching.tech  |  Slide 71 of 105</a:t>
             </a:r>
           </a:p>
         </p:txBody>
@@ -39869,7 +39869,7 @@
               </a:defRPr>
             </a:pPr>
             <a:r>
-              <a:t>WhatsApp / Helpline: +91 91101 13671  |  Official Website: sagarcoaching.tech  |  Slide 72 of 105</a:t>
+              <a:t>Official Website: sagarcoaching.tech  |  Slide 72 of 105</a:t>
             </a:r>
           </a:p>
         </p:txBody>
@@ -40403,7 +40403,7 @@
               </a:defRPr>
             </a:pPr>
             <a:r>
-              <a:t>WhatsApp / Helpline: +91 91101 13671  |  Official Website: sagarcoaching.tech  |  Slide 73 of 105</a:t>
+              <a:t>Official Website: sagarcoaching.tech  |  Slide 73 of 105</a:t>
             </a:r>
           </a:p>
         </p:txBody>
@@ -40869,7 +40869,7 @@
               </a:defRPr>
             </a:pPr>
             <a:r>
-              <a:t>WhatsApp / Helpline: +91 91101 13671  |  Official Website: sagarcoaching.tech  |  Slide 74 of 105</a:t>
+              <a:t>Official Website: sagarcoaching.tech  |  Slide 74 of 105</a:t>
             </a:r>
           </a:p>
         </p:txBody>
@@ -41403,7 +41403,7 @@
               </a:defRPr>
             </a:pPr>
             <a:r>
-              <a:t>WhatsApp / Helpline: +91 91101 13671  |  Official Website: sagarcoaching.tech  |  Slide 75 of 105</a:t>
+              <a:t>Official Website: sagarcoaching.tech  |  Slide 75 of 105</a:t>
             </a:r>
           </a:p>
         </p:txBody>
@@ -41869,7 +41869,7 @@
               </a:defRPr>
             </a:pPr>
             <a:r>
-              <a:t>WhatsApp / Helpline: +91 91101 13671  |  Official Website: sagarcoaching.tech  |  Slide 76 of 105</a:t>
+              <a:t>Official Website: sagarcoaching.tech  |  Slide 76 of 105</a:t>
             </a:r>
           </a:p>
         </p:txBody>
@@ -42403,7 +42403,7 @@
               </a:defRPr>
             </a:pPr>
             <a:r>
-              <a:t>WhatsApp / Helpline: +91 91101 13671  |  Official Website: sagarcoaching.tech  |  Slide 77 of 105</a:t>
+              <a:t>Official Website: sagarcoaching.tech  |  Slide 77 of 105</a:t>
             </a:r>
           </a:p>
         </p:txBody>
@@ -42869,7 +42869,7 @@
               </a:defRPr>
             </a:pPr>
             <a:r>
-              <a:t>WhatsApp / Helpline: +91 91101 13671  |  Official Website: sagarcoaching.tech  |  Slide 78 of 105</a:t>
+              <a:t>Official Website: sagarcoaching.tech  |  Slide 78 of 105</a:t>
             </a:r>
           </a:p>
         </p:txBody>
@@ -43403,7 +43403,7 @@
               </a:defRPr>
             </a:pPr>
             <a:r>
-              <a:t>WhatsApp / Helpline: +91 91101 13671  |  Official Website: sagarcoaching.tech  |  Slide 79 of 105</a:t>
+              <a:t>Official Website: sagarcoaching.tech  |  Slide 79 of 105</a:t>
             </a:r>
           </a:p>
         </p:txBody>
@@ -43869,7 +43869,7 @@
               </a:defRPr>
             </a:pPr>
             <a:r>
-              <a:t>WhatsApp / Helpline: +91 91101 13671  |  Official Website: sagarcoaching.tech  |  Slide 8 of 105</a:t>
+              <a:t>Official Website: sagarcoaching.tech  |  Slide 8 of 105</a:t>
             </a:r>
           </a:p>
         </p:txBody>
@@ -44403,7 +44403,7 @@
               </a:defRPr>
             </a:pPr>
             <a:r>
-              <a:t>WhatsApp / Helpline: +91 91101 13671  |  Official Website: sagarcoaching.tech  |  Slide 80 of 105</a:t>
+              <a:t>Official Website: sagarcoaching.tech  |  Slide 80 of 105</a:t>
             </a:r>
           </a:p>
         </p:txBody>
@@ -44937,7 +44937,7 @@
               </a:defRPr>
             </a:pPr>
             <a:r>
-              <a:t>WhatsApp / Helpline: +91 91101 13671  |  Official Website: sagarcoaching.tech  |  Slide 81 of 105</a:t>
+              <a:t>Official Website: sagarcoaching.tech  |  Slide 81 of 105</a:t>
             </a:r>
           </a:p>
         </p:txBody>
@@ -45403,7 +45403,7 @@
               </a:defRPr>
             </a:pPr>
             <a:r>
-              <a:t>WhatsApp / Helpline: +91 91101 13671  |  Official Website: sagarcoaching.tech  |  Slide 82 of 105</a:t>
+              <a:t>Official Website: sagarcoaching.tech  |  Slide 82 of 105</a:t>
             </a:r>
           </a:p>
         </p:txBody>
@@ -45937,7 +45937,7 @@
               </a:defRPr>
             </a:pPr>
             <a:r>
-              <a:t>WhatsApp / Helpline: +91 91101 13671  |  Official Website: sagarcoaching.tech  |  Slide 83 of 105</a:t>
+              <a:t>Official Website: sagarcoaching.tech  |  Slide 83 of 105</a:t>
             </a:r>
           </a:p>
         </p:txBody>
@@ -46403,7 +46403,7 @@
               </a:defRPr>
             </a:pPr>
             <a:r>
-              <a:t>WhatsApp / Helpline: +91 91101 13671  |  Official Website: sagarcoaching.tech  |  Slide 84 of 105</a:t>
+              <a:t>Official Website: sagarcoaching.tech  |  Slide 84 of 105</a:t>
             </a:r>
           </a:p>
         </p:txBody>
@@ -46937,7 +46937,7 @@
               </a:defRPr>
             </a:pPr>
             <a:r>
-              <a:t>WhatsApp / Helpline: +91 91101 13671  |  Official Website: sagarcoaching.tech  |  Slide 85 of 105</a:t>
+              <a:t>Official Website: sagarcoaching.tech  |  Slide 85 of 105</a:t>
             </a:r>
           </a:p>
         </p:txBody>
@@ -47403,7 +47403,7 @@
               </a:defRPr>
             </a:pPr>
             <a:r>
-              <a:t>WhatsApp / Helpline: +91 91101 13671  |  Official Website: sagarcoaching.tech  |  Slide 86 of 105</a:t>
+              <a:t>Official Website: sagarcoaching.tech  |  Slide 86 of 105</a:t>
             </a:r>
           </a:p>
         </p:txBody>
@@ -47937,7 +47937,7 @@
               </a:defRPr>
             </a:pPr>
             <a:r>
-              <a:t>WhatsApp / Helpline: +91 91101 13671  |  Official Website: sagarcoaching.tech  |  Slide 87 of 105</a:t>
+              <a:t>Official Website: sagarcoaching.tech  |  Slide 87 of 105</a:t>
             </a:r>
           </a:p>
         </p:txBody>
@@ -48403,7 +48403,7 @@
               </a:defRPr>
             </a:pPr>
             <a:r>
-              <a:t>WhatsApp / Helpline: +91 91101 13671  |  Official Website: sagarcoaching.tech  |  Slide 88 of 105</a:t>
+              <a:t>Official Website: sagarcoaching.tech  |  Slide 88 of 105</a:t>
             </a:r>
           </a:p>
         </p:txBody>
@@ -48937,7 +48937,7 @@
               </a:defRPr>
             </a:pPr>
             <a:r>
-              <a:t>WhatsApp / Helpline: +91 91101 13671  |  Official Website: sagarcoaching.tech  |  Slide 89 of 105</a:t>
+              <a:t>Official Website: sagarcoaching.tech  |  Slide 89 of 105</a:t>
             </a:r>
           </a:p>
         </p:txBody>
@@ -49403,7 +49403,7 @@
               </a:defRPr>
             </a:pPr>
             <a:r>
-              <a:t>WhatsApp / Helpline: +91 91101 13671  |  Official Website: sagarcoaching.tech  |  Slide 9 of 105</a:t>
+              <a:t>Official Website: sagarcoaching.tech  |  Slide 9 of 105</a:t>
             </a:r>
           </a:p>
         </p:txBody>
@@ -49869,7 +49869,7 @@
               </a:defRPr>
             </a:pPr>
             <a:r>
-              <a:t>WhatsApp / Helpline: +91 91101 13671  |  Official Website: sagarcoaching.tech  |  Slide 90 of 105</a:t>
+              <a:t>Official Website: sagarcoaching.tech  |  Slide 90 of 105</a:t>
             </a:r>
           </a:p>
         </p:txBody>
@@ -50403,7 +50403,7 @@
               </a:defRPr>
             </a:pPr>
             <a:r>
-              <a:t>WhatsApp / Helpline: +91 91101 13671  |  Official Website: sagarcoaching.tech  |  Slide 91 of 105</a:t>
+              <a:t>Official Website: sagarcoaching.tech  |  Slide 91 of 105</a:t>
             </a:r>
           </a:p>
         </p:txBody>
@@ -50869,7 +50869,7 @@
               </a:defRPr>
             </a:pPr>
             <a:r>
-              <a:t>WhatsApp / Helpline: +91 91101 13671  |  Official Website: sagarcoaching.tech  |  Slide 92 of 105</a:t>
+              <a:t>Official Website: sagarcoaching.tech  |  Slide 92 of 105</a:t>
             </a:r>
           </a:p>
         </p:txBody>
@@ -51403,7 +51403,7 @@
               </a:defRPr>
             </a:pPr>
             <a:r>
-              <a:t>WhatsApp / Helpline: +91 91101 13671  |  Official Website: sagarcoaching.tech  |  Slide 93 of 105</a:t>
+              <a:t>Official Website: sagarcoaching.tech  |  Slide 93 of 105</a:t>
             </a:r>
           </a:p>
         </p:txBody>
@@ -51869,7 +51869,7 @@
               </a:defRPr>
             </a:pPr>
             <a:r>
-              <a:t>WhatsApp / Helpline: +91 91101 13671  |  Official Website: sagarcoaching.tech  |  Slide 94 of 105</a:t>
+              <a:t>Official Website: sagarcoaching.tech  |  Slide 94 of 105</a:t>
             </a:r>
           </a:p>
         </p:txBody>
@@ -52403,7 +52403,7 @@
               </a:defRPr>
             </a:pPr>
             <a:r>
-              <a:t>WhatsApp / Helpline: +91 91101 13671  |  Official Website: sagarcoaching.tech  |  Slide 95 of 105</a:t>
+              <a:t>Official Website: sagarcoaching.tech  |  Slide 95 of 105</a:t>
             </a:r>
           </a:p>
         </p:txBody>
@@ -52869,7 +52869,7 @@
               </a:defRPr>
             </a:pPr>
             <a:r>
-              <a:t>WhatsApp / Helpline: +91 91101 13671  |  Official Website: sagarcoaching.tech  |  Slide 96 of 105</a:t>
+              <a:t>Official Website: sagarcoaching.tech  |  Slide 96 of 105</a:t>
             </a:r>
           </a:p>
         </p:txBody>
@@ -53403,7 +53403,7 @@
               </a:defRPr>
             </a:pPr>
             <a:r>
-              <a:t>WhatsApp / Helpline: +91 91101 13671  |  Official Website: sagarcoaching.tech  |  Slide 97 of 105</a:t>
+              <a:t>Official Website: sagarcoaching.tech  |  Slide 97 of 105</a:t>
             </a:r>
           </a:p>
         </p:txBody>
@@ -53869,7 +53869,7 @@
               </a:defRPr>
             </a:pPr>
             <a:r>
-              <a:t>WhatsApp / Helpline: +91 91101 13671  |  Official Website: sagarcoaching.tech  |  Slide 98 of 105</a:t>
+              <a:t>Official Website: sagarcoaching.tech  |  Slide 98 of 105</a:t>
             </a:r>
           </a:p>
         </p:txBody>
@@ -54403,7 +54403,7 @@
               </a:defRPr>
             </a:pPr>
             <a:r>
-              <a:t>WhatsApp / Helpline: +91 91101 13671  |  Official Website: sagarcoaching.tech  |  Slide 99 of 105</a:t>
+              <a:t>Official Website: sagarcoaching.tech  |  Slide 99 of 105</a:t>
             </a:r>
           </a:p>
         </p:txBody>

--- a/SST_Complete_Course_SagarSir/04_Full_Mock_Tests_महा_अभ्यास/Mock_Test_08.pptx
+++ b/SST_Complete_Course_SagarSir/04_Full_Mock_Tests_महा_अभ्यास/Mock_Test_08.pptx
@@ -3399,7 +3399,7 @@
               </a:defRPr>
             </a:pPr>
             <a:r>
-              <a:t>इतिहास के 20 अति-महत्वपूर्ण प्रश्न  ★  नागरिक शास्त्र एवं संविधान के 15 प्रश्न  ★  भूगोल एवं पर्यावरण के 15 प्रश्न  ★  2-स्लाइड इंटरैक्टिव पैटर्न (Answer Hidden Mode)  ★  ऑल इंडिया NMMS 35 में 35 अंक की 100% तैयारी</a:t>
+              <a:t>इतिहास के 20 अति-महत्वपूर्ण प्रश्न  ★  नागरिक शास्त्र एवं संविधान के 15 प्रश्न  ★  भूगोल एवं पर्यावरण के 15 प्रश्न  ★  ऑल इंडिया NMMS 35 में 35 अंक की 100% तैयारी</a:t>
             </a:r>
           </a:p>
         </p:txBody>
